--- a/presentations/PR_L11_SortingDepot_Lesson.pptx
+++ b/presentations/PR_L11_SortingDepot_Lesson.pptx
@@ -2617,7 +2617,7 @@
                 <a:ea typeface="IBM Plex Sans" pitchFamily="34" charset="-122"/>
                 <a:cs typeface="IBM Plex Sans" pitchFamily="34" charset="-120"/>
               </a:rPr>
-              <a:t>Mistake: binary searching an unsorted list, which quietly gives the wrong answer.</a:t>
+              <a:t>Common mistake: binary searching an unsorted list, which quietly gives the wrong answer.</a:t>
             </a:r>
             <a:endParaRPr lang="en-US" sz="1700" dirty="0"/>
           </a:p>
@@ -7773,7 +7773,7 @@
                 <a:ea typeface="IBM Plex Sans" pitchFamily="34" charset="-122"/>
                 <a:cs typeface="IBM Plex Sans" pitchFamily="34" charset="-120"/>
               </a:rPr>
-              <a:t>Mistake: printing 'not found' inside the loop, once for every item that did not match.</a:t>
+              <a:t>Common mistake: printing 'not found' inside the loop, once for every item that did not match.</a:t>
             </a:r>
             <a:endParaRPr lang="en-US" sz="1700" dirty="0"/>
           </a:p>
@@ -8349,7 +8349,7 @@
                 <a:ea typeface="IBM Plex Sans" pitchFamily="34" charset="-122"/>
                 <a:cs typeface="IBM Plex Sans" pitchFamily="34" charset="-120"/>
               </a:rPr>
-              <a:t>Mistake: not moving low or high, which leaves the loop checking the same middle forever.</a:t>
+              <a:t>Common mistake: not moving low or high, which leaves the loop checking the same middle forever.</a:t>
             </a:r>
             <a:endParaRPr lang="en-US" sz="1700" dirty="0"/>
           </a:p>
@@ -8925,7 +8925,7 @@
                 <a:ea typeface="IBM Plex Sans" pitchFamily="34" charset="-122"/>
                 <a:cs typeface="IBM Plex Sans" pitchFamily="34" charset="-120"/>
               </a:rPr>
-              <a:t>Mistake: a swap that loses a value, because one side was overwritten before it was copied.</a:t>
+              <a:t>Common mistake: a swap that loses a value, because one side was overwritten before it was copied.</a:t>
             </a:r>
             <a:endParaRPr lang="en-US" sz="1700" dirty="0"/>
           </a:p>
@@ -9501,7 +9501,7 @@
                 <a:ea typeface="IBM Plex Sans" pitchFamily="34" charset="-122"/>
                 <a:cs typeface="IBM Plex Sans" pitchFamily="34" charset="-120"/>
               </a:rPr>
-              <a:t>Mistake: overwriting an item instead of shifting it along to make room.</a:t>
+              <a:t>Common mistake: overwriting an item instead of shifting it along to make room.</a:t>
             </a:r>
             <a:endParaRPr lang="en-US" sz="1700" dirty="0"/>
           </a:p>
@@ -10077,7 +10077,7 @@
                 <a:ea typeface="IBM Plex Sans" pitchFamily="34" charset="-122"/>
                 <a:cs typeface="IBM Plex Sans" pitchFamily="34" charset="-120"/>
               </a:rPr>
-              <a:t>Mistake: stopping when one list runs out, instead of copying the rest of the other.</a:t>
+              <a:t>Common mistake: stopping when one list runs out, instead of copying the rest of the other.</a:t>
             </a:r>
             <a:endParaRPr lang="en-US" sz="1700" dirty="0"/>
           </a:p>
